--- a/figures_v14/figure1_methodology.pptx
+++ b/figures_v14/figure1_methodology.pptx
@@ -3090,42 +3090,7 @@
       <p:grpSpPr/>
       <p:sp>
         <p:nvSpPr>
-          <p:cNvPr id="2" name="TextBox 1"/>
-          <p:cNvSpPr txBox="1"/>
-          <p:nvPr/>
-        </p:nvSpPr>
-        <p:spPr>
-          <a:xfrm>
-            <a:off x="216000" y="108000"/>
-            <a:ext cx="8640000" cy="251999"/>
-          </a:xfrm>
-          <a:prstGeom prst="rect">
-            <a:avLst/>
-          </a:prstGeom>
-          <a:noFill/>
-        </p:spPr>
-        <p:txBody>
-          <a:bodyPr wrap="square">
-            <a:spAutoFit/>
-          </a:bodyPr>
-          <a:lstStyle/>
-          <a:p>
-            <a:pPr algn="l"/>
-            <a:r>
-              <a:rPr sz="1200" i="0" b="1">
-                <a:solidFill>
-                  <a:srgbClr val="1F3B57"/>
-                </a:solidFill>
-                <a:latin typeface="Calibri"/>
-              </a:rPr>
-              <a:t>Figure 1. Experimental pipeline and the four-part evaluation protocol</a:t>
-            </a:r>
-          </a:p>
-        </p:txBody>
-      </p:sp>
-      <p:sp>
-        <p:nvSpPr>
-          <p:cNvPr id="3" name="Rounded Rectangle 2"/>
+          <p:cNvPr id="2" name="Rounded Rectangle 1"/>
           <p:cNvSpPr/>
           <p:nvPr/>
         </p:nvSpPr>
@@ -3181,7 +3146,7 @@
       </p:sp>
       <p:sp>
         <p:nvSpPr>
-          <p:cNvPr id="4" name="Rounded Rectangle 3"/>
+          <p:cNvPr id="3" name="Rounded Rectangle 2"/>
           <p:cNvSpPr/>
           <p:nvPr/>
         </p:nvSpPr>
@@ -3238,7 +3203,7 @@
       </p:sp>
       <p:sp>
         <p:nvSpPr>
-          <p:cNvPr id="5" name="Rounded Rectangle 4"/>
+          <p:cNvPr id="4" name="Rounded Rectangle 3"/>
           <p:cNvSpPr/>
           <p:nvPr/>
         </p:nvSpPr>
@@ -3294,7 +3259,7 @@
       </p:sp>
       <p:sp>
         <p:nvSpPr>
-          <p:cNvPr id="6" name="Rounded Rectangle 5"/>
+          <p:cNvPr id="5" name="Rounded Rectangle 4"/>
           <p:cNvSpPr/>
           <p:nvPr/>
         </p:nvSpPr>
@@ -3343,15 +3308,15 @@
                 <a:latin typeface="Calibri"/>
               </a:rPr>
               <a:t>LLM via Ollama
-llama3.1 8B (Q4, Q8)
-mistral 7B, qwen2.5 7B</a:t>
-            </a:r>
-          </a:p>
-        </p:txBody>
-      </p:sp>
-      <p:sp>
-        <p:nvSpPr>
-          <p:cNvPr id="7" name="Rounded Rectangle 6"/>
+llama3.1 8B (Q4, Q8), mistral 7B
+qwen2.5 7B, deepseek-r1 7B</a:t>
+            </a:r>
+          </a:p>
+        </p:txBody>
+      </p:sp>
+      <p:sp>
+        <p:nvSpPr>
+          <p:cNvPr id="6" name="Rounded Rectangle 5"/>
           <p:cNvSpPr/>
           <p:nvPr/>
         </p:nvSpPr>
@@ -3407,13 +3372,48 @@
       </p:sp>
       <p:cxnSp>
         <p:nvCxnSpPr>
+          <p:cNvPr id="7" name="Connector 6"/>
+          <p:cNvCxnSpPr/>
+          <p:nvPr/>
+        </p:nvCxnSpPr>
+        <p:spPr>
+          <a:xfrm>
+            <a:off x="1512000" y="864000"/>
+            <a:ext cx="180000" cy="0"/>
+          </a:xfrm>
+          <a:prstGeom prst="bentConnector3">
+            <a:avLst/>
+          </a:prstGeom>
+          <a:ln w="15875">
+            <a:solidFill>
+              <a:srgbClr val="8C8C8C"/>
+            </a:solidFill>
+          </a:ln>
+        </p:spPr>
+        <p:style>
+          <a:lnRef idx="2">
+            <a:schemeClr val="accent1"/>
+          </a:lnRef>
+          <a:fillRef idx="0">
+            <a:schemeClr val="accent1"/>
+          </a:fillRef>
+          <a:effectRef idx="1">
+            <a:schemeClr val="accent1"/>
+          </a:effectRef>
+          <a:fontRef idx="minor">
+            <a:schemeClr val="tx1"/>
+          </a:fontRef>
+        </p:style>
+      </p:cxnSp>
+      <p:cxnSp>
+        <p:nvCxnSpPr>
           <p:cNvPr id="8" name="Connector 7"/>
           <p:cNvCxnSpPr/>
           <p:nvPr/>
         </p:nvCxnSpPr>
         <p:spPr>
           <a:xfrm>
-            <a:off x="1512000" y="864000"/>
+            <a:off x="2988000" y="864000"/>
             <a:ext cx="180000" cy="0"/>
           </a:xfrm>
           <a:prstGeom prst="bentConnector3">
@@ -3448,7 +3448,7 @@
         </p:nvCxnSpPr>
         <p:spPr>
           <a:xfrm>
-            <a:off x="2988000" y="864000"/>
+            <a:off x="4680000" y="864000"/>
             <a:ext cx="180000" cy="0"/>
           </a:xfrm>
           <a:prstGeom prst="bentConnector3">
@@ -3483,7 +3483,7 @@
         </p:nvCxnSpPr>
         <p:spPr>
           <a:xfrm>
-            <a:off x="4680000" y="864000"/>
+            <a:off x="6372000" y="864000"/>
             <a:ext cx="180000" cy="0"/>
           </a:xfrm>
           <a:prstGeom prst="bentConnector3">
@@ -3510,44 +3510,9 @@
           </a:fontRef>
         </p:style>
       </p:cxnSp>
-      <p:cxnSp>
-        <p:nvCxnSpPr>
-          <p:cNvPr id="11" name="Connector 10"/>
-          <p:cNvCxnSpPr/>
-          <p:nvPr/>
-        </p:nvCxnSpPr>
-        <p:spPr>
-          <a:xfrm>
-            <a:off x="6372000" y="864000"/>
-            <a:ext cx="180000" cy="0"/>
-          </a:xfrm>
-          <a:prstGeom prst="bentConnector3">
-            <a:avLst/>
-          </a:prstGeom>
-          <a:ln w="15875">
-            <a:solidFill>
-              <a:srgbClr val="8C8C8C"/>
-            </a:solidFill>
-          </a:ln>
-        </p:spPr>
-        <p:style>
-          <a:lnRef idx="2">
-            <a:schemeClr val="accent1"/>
-          </a:lnRef>
-          <a:fillRef idx="0">
-            <a:schemeClr val="accent1"/>
-          </a:fillRef>
-          <a:effectRef idx="1">
-            <a:schemeClr val="accent1"/>
-          </a:effectRef>
-          <a:fontRef idx="minor">
-            <a:schemeClr val="tx1"/>
-          </a:fontRef>
-        </p:style>
-      </p:cxnSp>
-      <p:sp>
-        <p:nvSpPr>
-          <p:cNvPr id="12" name="Rounded Rectangle 11"/>
+      <p:sp>
+        <p:nvSpPr>
+          <p:cNvPr id="11" name="Rounded Rectangle 10"/>
           <p:cNvSpPr/>
           <p:nvPr/>
         </p:nvSpPr>
@@ -3602,7 +3567,7 @@
       </p:sp>
       <p:sp>
         <p:nvSpPr>
-          <p:cNvPr id="13" name="Rounded Rectangle 12"/>
+          <p:cNvPr id="12" name="Rounded Rectangle 11"/>
           <p:cNvSpPr/>
           <p:nvPr/>
         </p:nvSpPr>
@@ -3657,7 +3622,7 @@
       </p:sp>
       <p:cxnSp>
         <p:nvCxnSpPr>
-          <p:cNvPr id="14" name="Connector 13"/>
+          <p:cNvPr id="13" name="Connector 12"/>
           <p:cNvCxnSpPr/>
           <p:nvPr/>
         </p:nvCxnSpPr>
@@ -3692,7 +3657,7 @@
       </p:cxnSp>
       <p:cxnSp>
         <p:nvCxnSpPr>
-          <p:cNvPr id="15" name="Connector 14"/>
+          <p:cNvPr id="14" name="Connector 13"/>
           <p:cNvCxnSpPr/>
           <p:nvPr/>
         </p:nvCxnSpPr>
@@ -3727,7 +3692,7 @@
       </p:cxnSp>
       <p:sp>
         <p:nvSpPr>
-          <p:cNvPr id="16" name="Rounded Rectangle 15"/>
+          <p:cNvPr id="15" name="Rounded Rectangle 14"/>
           <p:cNvSpPr/>
           <p:nvPr/>
         </p:nvSpPr>
@@ -3782,7 +3747,7 @@
       </p:sp>
       <p:cxnSp>
         <p:nvCxnSpPr>
-          <p:cNvPr id="17" name="Connector 16"/>
+          <p:cNvPr id="16" name="Connector 15"/>
           <p:cNvCxnSpPr/>
           <p:nvPr/>
         </p:nvCxnSpPr>
@@ -3817,7 +3782,7 @@
       </p:cxnSp>
       <p:sp>
         <p:nvSpPr>
-          <p:cNvPr id="18" name="Rectangle 17"/>
+          <p:cNvPr id="17" name="Rectangle 16"/>
           <p:cNvSpPr/>
           <p:nvPr/>
         </p:nvSpPr>
@@ -3872,7 +3837,7 @@
       </p:sp>
       <p:sp>
         <p:nvSpPr>
-          <p:cNvPr id="19" name="Rectangle 18"/>
+          <p:cNvPr id="18" name="Rectangle 17"/>
           <p:cNvSpPr/>
           <p:nvPr/>
         </p:nvSpPr>
@@ -3927,7 +3892,7 @@
       </p:sp>
       <p:sp>
         <p:nvSpPr>
-          <p:cNvPr id="20" name="Rectangle 19"/>
+          <p:cNvPr id="19" name="Rectangle 18"/>
           <p:cNvSpPr/>
           <p:nvPr/>
         </p:nvSpPr>
@@ -3983,7 +3948,7 @@
       </p:sp>
       <p:sp>
         <p:nvSpPr>
-          <p:cNvPr id="21" name="Rectangle 20"/>
+          <p:cNvPr id="20" name="Rectangle 19"/>
           <p:cNvSpPr/>
           <p:nvPr/>
         </p:nvSpPr>
@@ -4038,7 +4003,7 @@
       </p:sp>
       <p:sp>
         <p:nvSpPr>
-          <p:cNvPr id="22" name="Rectangle 21"/>
+          <p:cNvPr id="21" name="Rectangle 20"/>
           <p:cNvSpPr/>
           <p:nvPr/>
         </p:nvSpPr>
@@ -4095,7 +4060,7 @@
       </p:sp>
       <p:sp>
         <p:nvSpPr>
-          <p:cNvPr id="23" name="Rectangle 22"/>
+          <p:cNvPr id="22" name="Rectangle 21"/>
           <p:cNvSpPr/>
           <p:nvPr/>
         </p:nvSpPr>
@@ -4150,7 +4115,7 @@
       </p:sp>
       <p:sp>
         <p:nvSpPr>
-          <p:cNvPr id="24" name="Rectangle 23"/>
+          <p:cNvPr id="23" name="Rectangle 22"/>
           <p:cNvSpPr/>
           <p:nvPr/>
         </p:nvSpPr>
@@ -4207,7 +4172,7 @@
       </p:sp>
       <p:sp>
         <p:nvSpPr>
-          <p:cNvPr id="25" name="Rectangle 24"/>
+          <p:cNvPr id="24" name="Rectangle 23"/>
           <p:cNvSpPr/>
           <p:nvPr/>
         </p:nvSpPr>
@@ -4262,7 +4227,7 @@
       </p:sp>
       <p:sp>
         <p:nvSpPr>
-          <p:cNvPr id="26" name="Rectangle 25"/>
+          <p:cNvPr id="25" name="Rectangle 24"/>
           <p:cNvSpPr/>
           <p:nvPr/>
         </p:nvSpPr>
@@ -4319,7 +4284,7 @@
       </p:sp>
       <p:sp>
         <p:nvSpPr>
-          <p:cNvPr id="27" name="Rounded Rectangle 26"/>
+          <p:cNvPr id="26" name="Rounded Rectangle 25"/>
           <p:cNvSpPr/>
           <p:nvPr/>
         </p:nvSpPr>
@@ -4377,7 +4342,7 @@
       </p:sp>
       <p:cxnSp>
         <p:nvCxnSpPr>
-          <p:cNvPr id="28" name="Connector 27"/>
+          <p:cNvPr id="27" name="Connector 26"/>
           <p:cNvCxnSpPr/>
           <p:nvPr/>
         </p:nvCxnSpPr>
@@ -4412,7 +4377,7 @@
       </p:cxnSp>
       <p:sp>
         <p:nvSpPr>
-          <p:cNvPr id="29" name="TextBox 28"/>
+          <p:cNvPr id="28" name="TextBox 27"/>
           <p:cNvSpPr txBox="1"/>
           <p:nvPr/>
         </p:nvSpPr>
@@ -4447,7 +4412,7 @@
       </p:sp>
       <p:sp>
         <p:nvSpPr>
-          <p:cNvPr id="30" name="TextBox 29"/>
+          <p:cNvPr id="29" name="TextBox 28"/>
           <p:cNvSpPr txBox="1"/>
           <p:nvPr/>
         </p:nvSpPr>

--- a/figures_v14/figure1_methodology.pptx
+++ b/figures_v14/figure1_methodology.pptx
@@ -3138,7 +3138,7 @@
                 </a:solidFill>
                 <a:latin typeface="Calibri"/>
               </a:rPr>
-              <a:t>CMAPSS
+              <a:t>C-MAPSS
 FD001-FD004</a:t>
             </a:r>
           </a:p>
@@ -3265,8 +3265,8 @@
         </p:nvSpPr>
         <p:spPr>
           <a:xfrm>
-            <a:off x="4860000" y="576000"/>
-            <a:ext cx="1512000" cy="576000"/>
+            <a:off x="4860000" y="468000"/>
+            <a:ext cx="1655999" cy="792000"/>
           </a:xfrm>
           <a:prstGeom prst="roundRect">
             <a:avLst/>
@@ -3301,15 +3301,16 @@
           <a:p>
             <a:pPr algn="ctr"/>
             <a:r>
-              <a:rPr sz="1000" b="0">
+              <a:rPr sz="900" b="0">
                 <a:solidFill>
                   <a:srgbClr val="1F3B57"/>
                 </a:solidFill>
                 <a:latin typeface="Calibri"/>
               </a:rPr>
               <a:t>LLM via Ollama
-llama3.1 8B (Q4, Q8), mistral 7B
-qwen2.5 7B, deepseek-r1 7B</a:t>
+llama3.1 8B (Q4, Q8)
+mistral 7B, qwen2.5 7B
+deepseek-r1 7B</a:t>
             </a:r>
           </a:p>
         </p:txBody>
@@ -3322,7 +3323,7 @@
         </p:nvSpPr>
         <p:spPr>
           <a:xfrm>
-            <a:off x="6552000" y="576000"/>
+            <a:off x="6696000" y="576000"/>
             <a:ext cx="1224000" cy="576000"/>
           </a:xfrm>
           <a:prstGeom prst="roundRect">
@@ -3483,7 +3484,7 @@
         </p:nvCxnSpPr>
         <p:spPr>
           <a:xfrm>
-            <a:off x="6372000" y="864000"/>
+            <a:off x="6516000" y="864000"/>
             <a:ext cx="180000" cy="0"/>
           </a:xfrm>
           <a:prstGeom prst="bentConnector3">
@@ -3518,7 +3519,7 @@
         </p:nvSpPr>
         <p:spPr>
           <a:xfrm>
-            <a:off x="6696000" y="1404000"/>
+            <a:off x="6840000" y="1404000"/>
             <a:ext cx="936000" cy="360000"/>
           </a:xfrm>
           <a:prstGeom prst="roundRect">
@@ -4275,9 +4276,9 @@
                 </a:solidFill>
                 <a:latin typeface="Calibri"/>
               </a:rPr>
-              <a:t>Textbook agreement vs
-agreement with the window
-actually shown</a:t>
+              <a:t>Asserted direction vs
+the window actually shown
+vs the measured direction</a:t>
             </a:r>
           </a:p>
         </p:txBody>
@@ -4399,9 +4400,9 @@
           <a:p>
             <a:pPr algn="l"/>
             <a:r>
-              <a:rPr sz="900" i="1" b="0">
+              <a:rPr sz="1000" i="1" b="0">
                 <a:solidFill>
-                  <a:srgbClr val="8C8C8C"/>
+                  <a:srgbClr val="1F3B57"/>
                 </a:solidFill>
                 <a:latin typeface="Calibri"/>
               </a:rPr>
@@ -4434,9 +4435,9 @@
           <a:p>
             <a:pPr algn="l"/>
             <a:r>
-              <a:rPr sz="900" i="1" b="0">
+              <a:rPr sz="1000" i="1" b="0">
                 <a:solidFill>
-                  <a:srgbClr val="8C8C8C"/>
+                  <a:srgbClr val="1F3B57"/>
                 </a:solidFill>
                 <a:latin typeface="Calibri"/>
               </a:rPr>
